--- a/2026/LEC/02-2 Разложение и наивное предсказание.pptx
+++ b/2026/LEC/02-2 Разложение и наивное предсказание.pptx
@@ -254,7 +254,7 @@
           <a:p>
             <a:fld id="{C730246F-5962-E14A-AAF2-985CCFDAC345}" type="datetimeFigureOut">
               <a:rPr lang="ru-RU" smtClean="0"/>
-              <a:t>04.09.2025</a:t>
+              <a:t>05.03.2026</a:t>
             </a:fld>
             <a:endParaRPr lang="ru-RU"/>
           </a:p>
@@ -1202,7 +1202,7 @@
           <a:p>
             <a:fld id="{44343DC6-30E4-4569-999A-C703F926F2AF}" type="datetimeFigureOut">
               <a:rPr lang="en-US" smtClean="0"/>
-              <a:t>9/4/25</a:t>
+              <a:t>3/5/2026</a:t>
             </a:fld>
             <a:endParaRPr lang="en-US"/>
           </a:p>
@@ -1402,7 +1402,7 @@
           <a:p>
             <a:fld id="{44343DC6-30E4-4569-999A-C703F926F2AF}" type="datetimeFigureOut">
               <a:rPr lang="en-US" smtClean="0"/>
-              <a:t>9/4/25</a:t>
+              <a:t>3/5/2026</a:t>
             </a:fld>
             <a:endParaRPr lang="en-US"/>
           </a:p>
@@ -1612,7 +1612,7 @@
           <a:p>
             <a:fld id="{44343DC6-30E4-4569-999A-C703F926F2AF}" type="datetimeFigureOut">
               <a:rPr lang="en-US" smtClean="0"/>
-              <a:t>9/4/25</a:t>
+              <a:t>3/5/2026</a:t>
             </a:fld>
             <a:endParaRPr lang="en-US"/>
           </a:p>
@@ -1812,7 +1812,7 @@
           <a:p>
             <a:fld id="{44343DC6-30E4-4569-999A-C703F926F2AF}" type="datetimeFigureOut">
               <a:rPr lang="en-US" smtClean="0"/>
-              <a:t>9/4/25</a:t>
+              <a:t>3/5/2026</a:t>
             </a:fld>
             <a:endParaRPr lang="en-US"/>
           </a:p>
@@ -2088,7 +2088,7 @@
           <a:p>
             <a:fld id="{44343DC6-30E4-4569-999A-C703F926F2AF}" type="datetimeFigureOut">
               <a:rPr lang="en-US" smtClean="0"/>
-              <a:t>9/4/25</a:t>
+              <a:t>3/5/2026</a:t>
             </a:fld>
             <a:endParaRPr lang="en-US"/>
           </a:p>
@@ -2356,7 +2356,7 @@
           <a:p>
             <a:fld id="{44343DC6-30E4-4569-999A-C703F926F2AF}" type="datetimeFigureOut">
               <a:rPr lang="en-US" smtClean="0"/>
-              <a:t>9/4/25</a:t>
+              <a:t>3/5/2026</a:t>
             </a:fld>
             <a:endParaRPr lang="en-US"/>
           </a:p>
@@ -2771,7 +2771,7 @@
           <a:p>
             <a:fld id="{44343DC6-30E4-4569-999A-C703F926F2AF}" type="datetimeFigureOut">
               <a:rPr lang="en-US" smtClean="0"/>
-              <a:t>9/4/25</a:t>
+              <a:t>3/5/2026</a:t>
             </a:fld>
             <a:endParaRPr lang="en-US"/>
           </a:p>
@@ -2913,7 +2913,7 @@
           <a:p>
             <a:fld id="{44343DC6-30E4-4569-999A-C703F926F2AF}" type="datetimeFigureOut">
               <a:rPr lang="en-US" smtClean="0"/>
-              <a:t>9/4/25</a:t>
+              <a:t>3/5/2026</a:t>
             </a:fld>
             <a:endParaRPr lang="en-US"/>
           </a:p>
@@ -3026,7 +3026,7 @@
           <a:p>
             <a:fld id="{44343DC6-30E4-4569-999A-C703F926F2AF}" type="datetimeFigureOut">
               <a:rPr lang="en-US" smtClean="0"/>
-              <a:t>9/4/25</a:t>
+              <a:t>3/5/2026</a:t>
             </a:fld>
             <a:endParaRPr lang="en-US"/>
           </a:p>
@@ -3339,7 +3339,7 @@
           <a:p>
             <a:fld id="{44343DC6-30E4-4569-999A-C703F926F2AF}" type="datetimeFigureOut">
               <a:rPr lang="en-US" smtClean="0"/>
-              <a:t>9/4/25</a:t>
+              <a:t>3/5/2026</a:t>
             </a:fld>
             <a:endParaRPr lang="en-US"/>
           </a:p>
@@ -3628,7 +3628,7 @@
           <a:p>
             <a:fld id="{44343DC6-30E4-4569-999A-C703F926F2AF}" type="datetimeFigureOut">
               <a:rPr lang="en-US" smtClean="0"/>
-              <a:t>9/4/25</a:t>
+              <a:t>3/5/2026</a:t>
             </a:fld>
             <a:endParaRPr lang="en-US"/>
           </a:p>
@@ -3871,7 +3871,7 @@
           <a:p>
             <a:fld id="{44343DC6-30E4-4569-999A-C703F926F2AF}" type="datetimeFigureOut">
               <a:rPr lang="en-US" smtClean="0"/>
-              <a:t>9/4/25</a:t>
+              <a:t>3/5/2026</a:t>
             </a:fld>
             <a:endParaRPr lang="en-US"/>
           </a:p>
@@ -4307,7 +4307,7 @@
         <p:spPr>
           <a:xfrm>
             <a:off x="743483" y="934356"/>
-            <a:ext cx="10932920" cy="2334624"/>
+            <a:ext cx="10932920" cy="3561444"/>
           </a:xfrm>
         </p:spPr>
         <p:txBody>
@@ -4318,15 +4318,11 @@
           <a:p>
             <a:r>
               <a:rPr lang="ru-RU" sz="8000" b="1" dirty="0"/>
-              <a:t>Предсказания ВР с явной </a:t>
-            </a:r>
-            <a:r>
-              <a:rPr lang="en-US" sz="8000" b="1" dirty="0"/>
-              <a:t>TS </a:t>
-            </a:r>
-            <a:r>
-              <a:rPr lang="ru-RU" sz="8000" b="1" dirty="0"/>
-              <a:t>моделью</a:t>
+              <a:t>Предсказания ВР </a:t>
+            </a:r>
+            <a:r>
+              <a:rPr lang="ru-RU" sz="8000" b="1" dirty="0" smtClean="0"/>
+              <a:t>. Основные понятия, разложение ВР</a:t>
             </a:r>
             <a:endParaRPr lang="en-US" sz="8000" b="1" dirty="0"/>
           </a:p>
@@ -4342,6 +4338,13 @@
   <p:clrMapOvr>
     <a:masterClrMapping/>
   </p:clrMapOvr>
+  <p:timing>
+    <p:tnLst>
+      <p:par>
+        <p:cTn id="1" dur="indefinite" restart="never" nodeType="tmRoot"/>
+      </p:par>
+    </p:tnLst>
+  </p:timing>
 </p:sld>
 </file>
 
@@ -4518,6 +4521,13 @@
   <p:clrMapOvr>
     <a:masterClrMapping/>
   </p:clrMapOvr>
+  <p:timing>
+    <p:tnLst>
+      <p:par>
+        <p:cTn id="1" dur="indefinite" restart="never" nodeType="tmRoot"/>
+      </p:par>
+    </p:tnLst>
+  </p:timing>
 </p:sld>
 </file>
 
@@ -6712,6 +6722,13 @@
   <p:clrMapOvr>
     <a:masterClrMapping/>
   </p:clrMapOvr>
+  <p:timing>
+    <p:tnLst>
+      <p:par>
+        <p:cTn id="1" dur="indefinite" restart="never" nodeType="tmRoot"/>
+      </p:par>
+    </p:tnLst>
+  </p:timing>
 </p:sld>
 </file>
 
@@ -7451,6 +7468,12 @@
                         </a:rPr>
                         <a:t>Одна или </a:t>
                       </a:r>
+                      <a:r>
+                        <a:rPr lang="en-US" sz="1600" u="none" strike="noStrike" dirty="0">
+                          <a:effectLst/>
+                        </a:rPr>
+                        <a:t/>
+                      </a:r>
                       <a:br>
                         <a:rPr lang="en-US" sz="1600" u="none" strike="noStrike" dirty="0">
                           <a:effectLst/>
@@ -8543,6 +8566,12 @@
                           <a:effectLst/>
                         </a:rPr>
                         <a:t>+</a:t>
+                      </a:r>
+                      <a:r>
+                        <a:rPr lang="ru-RU" sz="1800" u="none" strike="noStrike" dirty="0">
+                          <a:effectLst/>
+                        </a:rPr>
+                        <a:t/>
                       </a:r>
                       <a:br>
                         <a:rPr lang="ru-RU" sz="1800" u="none" strike="noStrike" dirty="0">
@@ -9161,11 +9190,18 @@
   <p:clrMapOvr>
     <a:masterClrMapping/>
   </p:clrMapOvr>
+  <p:timing>
+    <p:tnLst>
+      <p:par>
+        <p:cTn id="1" dur="indefinite" restart="never" nodeType="tmRoot"/>
+      </p:par>
+    </p:tnLst>
+  </p:timing>
 </p:sld>
 </file>
 
 <file path=ppt/slides/slide13.xml><?xml version="1.0" encoding="utf-8"?>
-<p:sld xmlns:a="http://schemas.openxmlformats.org/drawingml/2006/main" xmlns:r="http://schemas.openxmlformats.org/officeDocument/2006/relationships" xmlns:p="http://schemas.openxmlformats.org/presentationml/2006/main">
+<p:sld xmlns:a="http://schemas.openxmlformats.org/drawingml/2006/main" xmlns:r="http://schemas.openxmlformats.org/officeDocument/2006/relationships" xmlns:p="http://schemas.openxmlformats.org/presentationml/2006/main" show="0">
   <p:cSld>
     <p:spTree>
       <p:nvGrpSpPr>
@@ -9665,6 +9701,21 @@
   <p:clrMapOvr>
     <a:masterClrMapping/>
   </p:clrMapOvr>
+  <mc:AlternateContent xmlns:mc="http://schemas.openxmlformats.org/markup-compatibility/2006">
+    <mc:Choice xmlns:p14="http://schemas.microsoft.com/office/powerpoint/2010/main" Requires="p14">
+      <p:transition spd="slow" p14:dur="2000"/>
+    </mc:Choice>
+    <mc:Fallback>
+      <p:transition spd="slow"/>
+    </mc:Fallback>
+  </mc:AlternateContent>
+  <p:timing>
+    <p:tnLst>
+      <p:par>
+        <p:cTn id="1" dur="indefinite" restart="never" nodeType="tmRoot"/>
+      </p:par>
+    </p:tnLst>
+  </p:timing>
 </p:sld>
 </file>
 
@@ -10082,6 +10133,12 @@
                     <a:cs typeface="Times New Roman" panose="02020603050405020304" pitchFamily="18" charset="0"/>
                   </a:rPr>
                   <a:t> – это остаточная часть (шумы), </a:t>
+                </a:r>
+                <a:r>
+                  <a:rPr lang="en-US" altLang="ru-RU" sz="1800" dirty="0">
+                    <a:cs typeface="Times New Roman" panose="02020603050405020304" pitchFamily="18" charset="0"/>
+                  </a:rPr>
+                  <a:t/>
                 </a:r>
                 <a:br>
                   <a:rPr lang="en-US" altLang="ru-RU" sz="1800" dirty="0">
@@ -10967,6 +11024,13 @@
   <p:clrMapOvr>
     <a:masterClrMapping/>
   </p:clrMapOvr>
+  <p:timing>
+    <p:tnLst>
+      <p:par>
+        <p:cTn id="1" dur="indefinite" restart="never" nodeType="tmRoot"/>
+      </p:par>
+    </p:tnLst>
+  </p:timing>
 </p:sld>
 </file>
 
@@ -12231,6 +12295,12 @@
                   </a:rPr>
                   <a:t>,</a:t>
                 </a:r>
+                <a:r>
+                  <a:rPr lang="ru-RU" altLang="ru-RU" sz="2000" i="1" dirty="0">
+                    <a:cs typeface="Times New Roman" panose="02020603050405020304" pitchFamily="18" charset="0"/>
+                  </a:rPr>
+                  <a:t/>
+                </a:r>
                 <a:br>
                   <a:rPr lang="ru-RU" altLang="ru-RU" sz="2000" i="1" dirty="0">
                     <a:cs typeface="Times New Roman" panose="02020603050405020304" pitchFamily="18" charset="0"/>
@@ -12979,6 +13049,13 @@
   <p:clrMapOvr>
     <a:masterClrMapping/>
   </p:clrMapOvr>
+  <p:timing>
+    <p:tnLst>
+      <p:par>
+        <p:cTn id="1" dur="indefinite" restart="never" nodeType="tmRoot"/>
+      </p:par>
+    </p:tnLst>
+  </p:timing>
 </p:sld>
 </file>
 
@@ -13584,6 +13661,13 @@
   <p:clrMapOvr>
     <a:masterClrMapping/>
   </p:clrMapOvr>
+  <p:timing>
+    <p:tnLst>
+      <p:par>
+        <p:cTn id="1" dur="indefinite" restart="never" nodeType="tmRoot"/>
+      </p:par>
+    </p:tnLst>
+  </p:timing>
 </p:sld>
 </file>
 
@@ -13784,6 +13868,13 @@
   <p:clrMapOvr>
     <a:masterClrMapping/>
   </p:clrMapOvr>
+  <p:timing>
+    <p:tnLst>
+      <p:par>
+        <p:cTn id="1" dur="indefinite" restart="never" nodeType="tmRoot"/>
+      </p:par>
+    </p:tnLst>
+  </p:timing>
 </p:sld>
 </file>
 
@@ -14265,6 +14356,13 @@
   <p:clrMapOvr>
     <a:masterClrMapping/>
   </p:clrMapOvr>
+  <p:timing>
+    <p:tnLst>
+      <p:par>
+        <p:cTn id="1" dur="indefinite" restart="never" nodeType="tmRoot"/>
+      </p:par>
+    </p:tnLst>
+  </p:timing>
 </p:sld>
 </file>
 
@@ -14596,6 +14694,13 @@
   <p:clrMapOvr>
     <a:masterClrMapping/>
   </p:clrMapOvr>
+  <p:timing>
+    <p:tnLst>
+      <p:par>
+        <p:cTn id="1" dur="indefinite" restart="never" nodeType="tmRoot"/>
+      </p:par>
+    </p:tnLst>
+  </p:timing>
 </p:sld>
 </file>
 
@@ -14915,6 +15020,21 @@
   <p:clrMapOvr>
     <a:masterClrMapping/>
   </p:clrMapOvr>
+  <mc:AlternateContent xmlns:mc="http://schemas.openxmlformats.org/markup-compatibility/2006">
+    <mc:Choice xmlns:p14="http://schemas.microsoft.com/office/powerpoint/2010/main" Requires="p14">
+      <p:transition spd="slow" p14:dur="2000"/>
+    </mc:Choice>
+    <mc:Fallback>
+      <p:transition spd="slow"/>
+    </mc:Fallback>
+  </mc:AlternateContent>
+  <p:timing>
+    <p:tnLst>
+      <p:par>
+        <p:cTn id="1" dur="indefinite" restart="never" nodeType="tmRoot"/>
+      </p:par>
+    </p:tnLst>
+  </p:timing>
 </p:sld>
 </file>
 
@@ -15409,6 +15529,13 @@
   <p:clrMapOvr>
     <a:masterClrMapping/>
   </p:clrMapOvr>
+  <p:timing>
+    <p:tnLst>
+      <p:par>
+        <p:cTn id="1" dur="indefinite" restart="never" nodeType="tmRoot"/>
+      </p:par>
+    </p:tnLst>
+  </p:timing>
 </p:sld>
 </file>
 
@@ -15625,6 +15752,13 @@
   <p:clrMapOvr>
     <a:masterClrMapping/>
   </p:clrMapOvr>
+  <p:timing>
+    <p:tnLst>
+      <p:par>
+        <p:cTn id="1" dur="indefinite" restart="never" nodeType="tmRoot"/>
+      </p:par>
+    </p:tnLst>
+  </p:timing>
 </p:sld>
 </file>
 
@@ -15849,6 +15983,13 @@
   <p:clrMapOvr>
     <a:masterClrMapping/>
   </p:clrMapOvr>
+  <p:timing>
+    <p:tnLst>
+      <p:par>
+        <p:cTn id="1" dur="indefinite" restart="never" nodeType="tmRoot"/>
+      </p:par>
+    </p:tnLst>
+  </p:timing>
 </p:sld>
 </file>
 
@@ -16974,6 +17115,13 @@
   <p:clrMapOvr>
     <a:masterClrMapping/>
   </p:clrMapOvr>
+  <p:timing>
+    <p:tnLst>
+      <p:par>
+        <p:cTn id="1" dur="indefinite" restart="never" nodeType="tmRoot"/>
+      </p:par>
+    </p:tnLst>
+  </p:timing>
 </p:sld>
 </file>
 
@@ -17304,6 +17452,13 @@
   <p:clrMapOvr>
     <a:masterClrMapping/>
   </p:clrMapOvr>
+  <p:timing>
+    <p:tnLst>
+      <p:par>
+        <p:cTn id="1" dur="indefinite" restart="never" nodeType="tmRoot"/>
+      </p:par>
+    </p:tnLst>
+  </p:timing>
 </p:sld>
 </file>
 
@@ -17462,6 +17617,13 @@
   <p:clrMapOvr>
     <a:masterClrMapping/>
   </p:clrMapOvr>
+  <p:timing>
+    <p:tnLst>
+      <p:par>
+        <p:cTn id="1" dur="indefinite" restart="never" nodeType="tmRoot"/>
+      </p:par>
+    </p:tnLst>
+  </p:timing>
 </p:sld>
 </file>
 
@@ -17697,6 +17859,50 @@
           </a:p>
         </p:txBody>
       </p:sp>
+      <p:sp>
+        <p:nvSpPr>
+          <p:cNvPr id="8" name="Прямоугольник 7"/>
+          <p:cNvSpPr/>
+          <p:nvPr/>
+        </p:nvSpPr>
+        <p:spPr>
+          <a:xfrm>
+            <a:off x="9304020" y="3048000"/>
+            <a:ext cx="1082040" cy="220980"/>
+          </a:xfrm>
+          <a:prstGeom prst="rect">
+            <a:avLst/>
+          </a:prstGeom>
+        </p:spPr>
+        <p:style>
+          <a:lnRef idx="2">
+            <a:schemeClr val="accent1">
+              <a:shade val="50000"/>
+            </a:schemeClr>
+          </a:lnRef>
+          <a:fillRef idx="1">
+            <a:schemeClr val="accent1"/>
+          </a:fillRef>
+          <a:effectRef idx="0">
+            <a:schemeClr val="accent1"/>
+          </a:effectRef>
+          <a:fontRef idx="minor">
+            <a:schemeClr val="lt1"/>
+          </a:fontRef>
+        </p:style>
+        <p:txBody>
+          <a:bodyPr rtlCol="0" anchor="ctr"/>
+          <a:lstStyle/>
+          <a:p>
+            <a:pPr algn="ctr"/>
+            <a:r>
+              <a:rPr lang="en-US" sz="1400" dirty="0" smtClean="0"/>
+              <a:t>foundation</a:t>
+            </a:r>
+            <a:endParaRPr lang="ru-RU" sz="1400" dirty="0"/>
+          </a:p>
+        </p:txBody>
+      </p:sp>
     </p:spTree>
     <p:extLst>
       <p:ext uri="{BB962C8B-B14F-4D97-AF65-F5344CB8AC3E}">
@@ -17707,6 +17913,13 @@
   <p:clrMapOvr>
     <a:masterClrMapping/>
   </p:clrMapOvr>
+  <p:timing>
+    <p:tnLst>
+      <p:par>
+        <p:cTn id="1" dur="indefinite" restart="never" nodeType="tmRoot"/>
+      </p:par>
+    </p:tnLst>
+  </p:timing>
 </p:sld>
 </file>
 
@@ -17880,6 +18093,13 @@
   <p:clrMapOvr>
     <a:masterClrMapping/>
   </p:clrMapOvr>
+  <p:timing>
+    <p:tnLst>
+      <p:par>
+        <p:cTn id="1" dur="indefinite" restart="never" nodeType="tmRoot"/>
+      </p:par>
+    </p:tnLst>
+  </p:timing>
 </p:sld>
 </file>
 
@@ -18232,6 +18452,13 @@
   <p:clrMapOvr>
     <a:masterClrMapping/>
   </p:clrMapOvr>
+  <p:timing>
+    <p:tnLst>
+      <p:par>
+        <p:cTn id="1" dur="indefinite" restart="never" nodeType="tmRoot"/>
+      </p:par>
+    </p:tnLst>
+  </p:timing>
 </p:sld>
 </file>
 
@@ -18297,7 +18524,7 @@
         </p:nvGraphicFramePr>
         <p:xfrm>
           <a:off x="228598" y="1401333"/>
-          <a:ext cx="11671666" cy="4494378"/>
+          <a:ext cx="11671666" cy="4576737"/>
         </p:xfrm>
         <a:graphic>
           <a:graphicData uri="http://schemas.openxmlformats.org/drawingml/2006/table">
@@ -20713,6 +20940,13 @@
   <p:clrMapOvr>
     <a:masterClrMapping/>
   </p:clrMapOvr>
+  <p:timing>
+    <p:tnLst>
+      <p:par>
+        <p:cTn id="1" dur="indefinite" restart="never" nodeType="tmRoot"/>
+      </p:par>
+    </p:tnLst>
+  </p:timing>
 </p:sld>
 </file>
 
@@ -23487,6 +23721,13 @@
   <p:clrMapOvr>
     <a:masterClrMapping/>
   </p:clrMapOvr>
+  <p:timing>
+    <p:tnLst>
+      <p:par>
+        <p:cTn id="1" dur="indefinite" restart="never" nodeType="tmRoot"/>
+      </p:par>
+    </p:tnLst>
+  </p:timing>
 </p:sld>
 </file>
 
@@ -23733,6 +23974,13 @@
   <p:clrMapOvr>
     <a:masterClrMapping/>
   </p:clrMapOvr>
+  <p:timing>
+    <p:tnLst>
+      <p:par>
+        <p:cTn id="1" dur="indefinite" restart="never" nodeType="tmRoot"/>
+      </p:par>
+    </p:tnLst>
+  </p:timing>
 </p:sld>
 </file>
 
@@ -24924,6 +25172,13 @@
   <p:clrMapOvr>
     <a:masterClrMapping/>
   </p:clrMapOvr>
+  <p:timing>
+    <p:tnLst>
+      <p:par>
+        <p:cTn id="1" dur="indefinite" restart="never" nodeType="tmRoot"/>
+      </p:par>
+    </p:tnLst>
+  </p:timing>
 </p:sld>
 </file>
 

--- a/2026/LEC/02-2 Разложение и наивное предсказание.pptx
+++ b/2026/LEC/02-2 Разложение и наивное предсказание.pptx
@@ -254,7 +254,7 @@
           <a:p>
             <a:fld id="{C730246F-5962-E14A-AAF2-985CCFDAC345}" type="datetimeFigureOut">
               <a:rPr lang="ru-RU" smtClean="0"/>
-              <a:t>05.03.2026</a:t>
+              <a:t>16.03.2026</a:t>
             </a:fld>
             <a:endParaRPr lang="ru-RU"/>
           </a:p>
@@ -1202,7 +1202,7 @@
           <a:p>
             <a:fld id="{44343DC6-30E4-4569-999A-C703F926F2AF}" type="datetimeFigureOut">
               <a:rPr lang="en-US" smtClean="0"/>
-              <a:t>3/5/2026</a:t>
+              <a:t>3/16/2026</a:t>
             </a:fld>
             <a:endParaRPr lang="en-US"/>
           </a:p>
@@ -1402,7 +1402,7 @@
           <a:p>
             <a:fld id="{44343DC6-30E4-4569-999A-C703F926F2AF}" type="datetimeFigureOut">
               <a:rPr lang="en-US" smtClean="0"/>
-              <a:t>3/5/2026</a:t>
+              <a:t>3/16/2026</a:t>
             </a:fld>
             <a:endParaRPr lang="en-US"/>
           </a:p>
@@ -1612,7 +1612,7 @@
           <a:p>
             <a:fld id="{44343DC6-30E4-4569-999A-C703F926F2AF}" type="datetimeFigureOut">
               <a:rPr lang="en-US" smtClean="0"/>
-              <a:t>3/5/2026</a:t>
+              <a:t>3/16/2026</a:t>
             </a:fld>
             <a:endParaRPr lang="en-US"/>
           </a:p>
@@ -1812,7 +1812,7 @@
           <a:p>
             <a:fld id="{44343DC6-30E4-4569-999A-C703F926F2AF}" type="datetimeFigureOut">
               <a:rPr lang="en-US" smtClean="0"/>
-              <a:t>3/5/2026</a:t>
+              <a:t>3/16/2026</a:t>
             </a:fld>
             <a:endParaRPr lang="en-US"/>
           </a:p>
@@ -2088,7 +2088,7 @@
           <a:p>
             <a:fld id="{44343DC6-30E4-4569-999A-C703F926F2AF}" type="datetimeFigureOut">
               <a:rPr lang="en-US" smtClean="0"/>
-              <a:t>3/5/2026</a:t>
+              <a:t>3/16/2026</a:t>
             </a:fld>
             <a:endParaRPr lang="en-US"/>
           </a:p>
@@ -2356,7 +2356,7 @@
           <a:p>
             <a:fld id="{44343DC6-30E4-4569-999A-C703F926F2AF}" type="datetimeFigureOut">
               <a:rPr lang="en-US" smtClean="0"/>
-              <a:t>3/5/2026</a:t>
+              <a:t>3/16/2026</a:t>
             </a:fld>
             <a:endParaRPr lang="en-US"/>
           </a:p>
@@ -2771,7 +2771,7 @@
           <a:p>
             <a:fld id="{44343DC6-30E4-4569-999A-C703F926F2AF}" type="datetimeFigureOut">
               <a:rPr lang="en-US" smtClean="0"/>
-              <a:t>3/5/2026</a:t>
+              <a:t>3/16/2026</a:t>
             </a:fld>
             <a:endParaRPr lang="en-US"/>
           </a:p>
@@ -2913,7 +2913,7 @@
           <a:p>
             <a:fld id="{44343DC6-30E4-4569-999A-C703F926F2AF}" type="datetimeFigureOut">
               <a:rPr lang="en-US" smtClean="0"/>
-              <a:t>3/5/2026</a:t>
+              <a:t>3/16/2026</a:t>
             </a:fld>
             <a:endParaRPr lang="en-US"/>
           </a:p>
@@ -3026,7 +3026,7 @@
           <a:p>
             <a:fld id="{44343DC6-30E4-4569-999A-C703F926F2AF}" type="datetimeFigureOut">
               <a:rPr lang="en-US" smtClean="0"/>
-              <a:t>3/5/2026</a:t>
+              <a:t>3/16/2026</a:t>
             </a:fld>
             <a:endParaRPr lang="en-US"/>
           </a:p>
@@ -3339,7 +3339,7 @@
           <a:p>
             <a:fld id="{44343DC6-30E4-4569-999A-C703F926F2AF}" type="datetimeFigureOut">
               <a:rPr lang="en-US" smtClean="0"/>
-              <a:t>3/5/2026</a:t>
+              <a:t>3/16/2026</a:t>
             </a:fld>
             <a:endParaRPr lang="en-US"/>
           </a:p>
@@ -3628,7 +3628,7 @@
           <a:p>
             <a:fld id="{44343DC6-30E4-4569-999A-C703F926F2AF}" type="datetimeFigureOut">
               <a:rPr lang="en-US" smtClean="0"/>
-              <a:t>3/5/2026</a:t>
+              <a:t>3/16/2026</a:t>
             </a:fld>
             <a:endParaRPr lang="en-US"/>
           </a:p>
@@ -3871,7 +3871,7 @@
           <a:p>
             <a:fld id="{44343DC6-30E4-4569-999A-C703F926F2AF}" type="datetimeFigureOut">
               <a:rPr lang="en-US" smtClean="0"/>
-              <a:t>3/5/2026</a:t>
+              <a:t>3/16/2026</a:t>
             </a:fld>
             <a:endParaRPr lang="en-US"/>
           </a:p>
@@ -9701,11 +9701,11 @@
   <p:clrMapOvr>
     <a:masterClrMapping/>
   </p:clrMapOvr>
-  <mc:AlternateContent xmlns:mc="http://schemas.openxmlformats.org/markup-compatibility/2006">
-    <mc:Choice xmlns:p14="http://schemas.microsoft.com/office/powerpoint/2010/main" Requires="p14">
+  <mc:AlternateContent xmlns:mc="http://schemas.openxmlformats.org/markup-compatibility/2006" xmlns:p14="http://schemas.microsoft.com/office/powerpoint/2010/main">
+    <mc:Choice Requires="p14">
       <p:transition spd="slow" p14:dur="2000"/>
     </mc:Choice>
-    <mc:Fallback>
+    <mc:Fallback xmlns="">
       <p:transition spd="slow"/>
     </mc:Fallback>
   </mc:AlternateContent>
@@ -15020,11 +15020,11 @@
   <p:clrMapOvr>
     <a:masterClrMapping/>
   </p:clrMapOvr>
-  <mc:AlternateContent xmlns:mc="http://schemas.openxmlformats.org/markup-compatibility/2006">
-    <mc:Choice xmlns:p14="http://schemas.microsoft.com/office/powerpoint/2010/main" Requires="p14">
+  <mc:AlternateContent xmlns:mc="http://schemas.openxmlformats.org/markup-compatibility/2006" xmlns:p14="http://schemas.microsoft.com/office/powerpoint/2010/main">
+    <mc:Choice Requires="p14">
       <p:transition spd="slow" p14:dur="2000"/>
     </mc:Choice>
-    <mc:Fallback>
+    <mc:Fallback xmlns="">
       <p:transition spd="slow"/>
     </mc:Fallback>
   </mc:AlternateContent>
@@ -18524,7 +18524,7 @@
         </p:nvGraphicFramePr>
         <p:xfrm>
           <a:off x="228598" y="1401333"/>
-          <a:ext cx="11671666" cy="4576737"/>
+          <a:ext cx="11671666" cy="4494123"/>
         </p:xfrm>
         <a:graphic>
           <a:graphicData uri="http://schemas.openxmlformats.org/drawingml/2006/table">
